--- a/docs/report/ProofPilot_Progress_Report.pptx
+++ b/docs/report/ProofPilot_Progress_Report.pptx
@@ -3390,7 +3390,7 @@
                 </a:solidFill>
                 <a:latin typeface="Calibri"/>
               </a:rPr>
-              <a:t>Report built from commit eed9ecf</a:t>
+              <a:t>Report built from local commit b0a43f1 (not yet pushed -- see slide 6)</a:t>
             </a:r>
           </a:p>
         </p:txBody>
@@ -3528,7 +3528,7 @@
                 </a:solidFill>
                 <a:latin typeface="Calibri"/>
               </a:rPr>
-              <a:t>9. Contribution Statement and AI Disclosure</a:t>
+              <a:t>10. Contribution Statement and AI Disclosure</a:t>
             </a:r>
           </a:p>
         </p:txBody>
@@ -4316,7 +4316,7 @@
                           </a:solidFill>
                           <a:latin typeface="Calibri"/>
                         </a:rPr>
-                        <a:t>58/71 commits carry Co-Authored-By: Claude Opus 5</a:t>
+                        <a:t>76/86 commits carry Co-Authored-By: Claude (Opus 5 or Sonnet 5)</a:t>
                       </a:r>
                     </a:p>
                   </a:txBody>
@@ -6696,8 +6696,8 @@
         </p:nvSpPr>
         <p:spPr>
           <a:xfrm>
-            <a:off x="320040" y="2011680"/>
-            <a:ext cx="11521440" cy="365760"/>
+            <a:off x="320040" y="1993392"/>
+            <a:ext cx="11521440" cy="685800"/>
           </a:xfrm>
           <a:prstGeom prst="rect">
             <a:avLst/>
@@ -6717,7 +6717,18 @@
                 </a:solidFill>
                 <a:latin typeface="Calibri"/>
               </a:rPr>
-              <a:t>6-stage pipeline, per docs/HLD.md §7 (not 9 — flagged in FACTS.md as a brief/design mismatch to clarify, not invented to match)</a:t>
+              <a:t>Above: the 6-step INTERNAL pipeline (docs/HLD.md §7). Not the only "stage" count -- three numbers, kept separate rather than flattened to one (FACTS.md §9):</a:t>
+            </a:r>
+          </a:p>
+          <a:p>
+            <a:r>
+              <a:rPr sz="1100" b="1" i="0">
+                <a:solidFill>
+                  <a:srgbClr val="1F4E79"/>
+                </a:solidFill>
+                <a:latin typeface="Calibri"/>
+              </a:rPr>
+              <a:t>3 UI screens  •  5-value state machine (read/facts/translate/prove/explain -- translate now universal, HLD v2.12)  •  6-step internal pipeline (above)</a:t>
             </a:r>
           </a:p>
         </p:txBody>
@@ -6730,7 +6741,7 @@
         </p:nvSpPr>
         <p:spPr>
           <a:xfrm>
-            <a:off x="320040" y="2606040"/>
+            <a:off x="320040" y="2788920"/>
             <a:ext cx="2697480" cy="1188720"/>
           </a:xfrm>
           <a:prstGeom prst="rect">
@@ -6776,7 +6787,7 @@
         </p:nvSpPr>
         <p:spPr>
           <a:xfrm>
-            <a:off x="411480" y="2679192"/>
+            <a:off x="411480" y="2862072"/>
             <a:ext cx="2514600" cy="320040"/>
           </a:xfrm>
           <a:prstGeom prst="rect">
@@ -6810,7 +6821,7 @@
         </p:nvSpPr>
         <p:spPr>
           <a:xfrm>
-            <a:off x="411480" y="3017520"/>
+            <a:off x="411480" y="3200400"/>
             <a:ext cx="2514600" cy="685800"/>
           </a:xfrm>
           <a:prstGeom prst="rect">
@@ -6855,7 +6866,7 @@
         </p:nvSpPr>
         <p:spPr>
           <a:xfrm>
-            <a:off x="3017520" y="2971800"/>
+            <a:off x="3017520" y="3154680"/>
             <a:ext cx="182880" cy="457200"/>
           </a:xfrm>
           <a:prstGeom prst="rect">
@@ -6890,7 +6901,7 @@
         </p:nvSpPr>
         <p:spPr>
           <a:xfrm>
-            <a:off x="3200400" y="2606040"/>
+            <a:off x="3200400" y="2788920"/>
             <a:ext cx="2697480" cy="1188720"/>
           </a:xfrm>
           <a:prstGeom prst="rect">
@@ -6936,7 +6947,7 @@
         </p:nvSpPr>
         <p:spPr>
           <a:xfrm>
-            <a:off x="3291840" y="2679192"/>
+            <a:off x="3291840" y="2862072"/>
             <a:ext cx="2514600" cy="320040"/>
           </a:xfrm>
           <a:prstGeom prst="rect">
@@ -6970,7 +6981,7 @@
         </p:nvSpPr>
         <p:spPr>
           <a:xfrm>
-            <a:off x="3291840" y="3017520"/>
+            <a:off x="3291840" y="3200400"/>
             <a:ext cx="2514600" cy="685800"/>
           </a:xfrm>
           <a:prstGeom prst="rect">
@@ -7015,7 +7026,7 @@
         </p:nvSpPr>
         <p:spPr>
           <a:xfrm>
-            <a:off x="5897880" y="2971800"/>
+            <a:off x="5897880" y="3154680"/>
             <a:ext cx="182880" cy="457200"/>
           </a:xfrm>
           <a:prstGeom prst="rect">
@@ -7050,7 +7061,7 @@
         </p:nvSpPr>
         <p:spPr>
           <a:xfrm>
-            <a:off x="6080760" y="2606040"/>
+            <a:off x="6080760" y="2788920"/>
             <a:ext cx="2697480" cy="1188720"/>
           </a:xfrm>
           <a:prstGeom prst="rect">
@@ -7096,7 +7107,7 @@
         </p:nvSpPr>
         <p:spPr>
           <a:xfrm>
-            <a:off x="6172200" y="2679192"/>
+            <a:off x="6172200" y="2862072"/>
             <a:ext cx="2514600" cy="320040"/>
           </a:xfrm>
           <a:prstGeom prst="rect">
@@ -7130,7 +7141,7 @@
         </p:nvSpPr>
         <p:spPr>
           <a:xfrm>
-            <a:off x="6172200" y="3017520"/>
+            <a:off x="6172200" y="3200400"/>
             <a:ext cx="2514600" cy="685800"/>
           </a:xfrm>
           <a:prstGeom prst="rect">
@@ -7175,7 +7186,7 @@
         </p:nvSpPr>
         <p:spPr>
           <a:xfrm>
-            <a:off x="8778240" y="2971800"/>
+            <a:off x="8778240" y="3154680"/>
             <a:ext cx="182880" cy="457200"/>
           </a:xfrm>
           <a:prstGeom prst="rect">
@@ -7210,7 +7221,7 @@
         </p:nvSpPr>
         <p:spPr>
           <a:xfrm>
-            <a:off x="8961120" y="2606040"/>
+            <a:off x="8961120" y="2788920"/>
             <a:ext cx="2697480" cy="1188720"/>
           </a:xfrm>
           <a:prstGeom prst="rect">
@@ -7256,7 +7267,7 @@
         </p:nvSpPr>
         <p:spPr>
           <a:xfrm>
-            <a:off x="9052560" y="2679192"/>
+            <a:off x="9052560" y="2862072"/>
             <a:ext cx="2514600" cy="320040"/>
           </a:xfrm>
           <a:prstGeom prst="rect">
@@ -7277,7 +7288,7 @@
                 </a:solidFill>
                 <a:latin typeface="Calibri"/>
               </a:rPr>
-              <a:t>core/ (12 modules)</a:t>
+              <a:t>core/ (15 modules)</a:t>
             </a:r>
           </a:p>
         </p:txBody>
@@ -7290,7 +7301,7 @@
         </p:nvSpPr>
         <p:spPr>
           <a:xfrm>
-            <a:off x="9052560" y="3017520"/>
+            <a:off x="9052560" y="3200400"/>
             <a:ext cx="2514600" cy="685800"/>
           </a:xfrm>
           <a:prstGeom prst="rect">
@@ -7335,7 +7346,7 @@
         </p:nvSpPr>
         <p:spPr>
           <a:xfrm>
-            <a:off x="320040" y="3977639"/>
+            <a:off x="320040" y="4160520"/>
             <a:ext cx="11521440" cy="365760"/>
           </a:xfrm>
           <a:prstGeom prst="rect">
@@ -7369,7 +7380,7 @@
         </p:nvSpPr>
         <p:spPr>
           <a:xfrm>
-            <a:off x="320040" y="4343400"/>
+            <a:off x="320040" y="4526280"/>
             <a:ext cx="11521440" cy="1737360"/>
           </a:xfrm>
           <a:prstGeom prst="rect">
@@ -8461,7 +8472,7 @@
         </p:nvGraphicFramePr>
         <p:xfrm>
           <a:off x="274320" y="1188720"/>
-          <a:ext cx="11612880" cy="4023360"/>
+          <a:ext cx="11612880" cy="4160520"/>
         </p:xfrm>
         <a:graphic>
           <a:graphicData uri="http://schemas.openxmlformats.org/drawingml/2006/table">
@@ -8470,18 +8481,18 @@
                 <a:tableStyleId>{5C22544A-7EE6-4342-B048-85BDC9FD1C3A}</a:tableStyleId>
               </a:tblPr>
               <a:tblGrid>
-                <a:gridCol w="3931920"/>
-                <a:gridCol w="7680960"/>
+                <a:gridCol w="3566160"/>
+                <a:gridCol w="8046720"/>
               </a:tblGrid>
-              <a:tr h="502920">
-                <a:tc>
-                  <a:txBody>
-                    <a:bodyPr wrap="square"/>
-                    <a:lstStyle/>
-                    <a:p>
-                      <a:pPr algn="l"/>
-                      <a:r>
-                        <a:rPr sz="1400" b="1" i="0">
+              <a:tr h="416052">
+                <a:tc>
+                  <a:txBody>
+                    <a:bodyPr wrap="square"/>
+                    <a:lstStyle/>
+                    <a:p>
+                      <a:pPr algn="l"/>
+                      <a:r>
+                        <a:rPr sz="1200" b="1" i="0">
                           <a:solidFill>
                             <a:srgbClr val="FFFFFF"/>
                           </a:solidFill>
@@ -8504,7 +8515,7 @@
                     <a:p>
                       <a:pPr algn="l"/>
                       <a:r>
-                        <a:rPr sz="1400" b="1" i="0">
+                        <a:rPr sz="1200" b="1" i="0">
                           <a:solidFill>
                             <a:srgbClr val="FFFFFF"/>
                           </a:solidFill>
@@ -8521,17 +8532,17 @@
                   </a:tcPr>
                 </a:tc>
               </a:tr>
-              <a:tr h="502920">
-                <a:tc>
-                  <a:txBody>
-                    <a:bodyPr wrap="square"/>
-                    <a:lstStyle/>
-                    <a:p>
-                      <a:pPr algn="l"/>
-                      <a:r>
-                        <a:rPr sz="1300" b="1" i="0">
-                          <a:solidFill>
-                            <a:srgbClr val="FFFFFF"/>
+              <a:tr h="416052">
+                <a:tc>
+                  <a:txBody>
+                    <a:bodyPr wrap="square"/>
+                    <a:lstStyle/>
+                    <a:p>
+                      <a:pPr algn="l"/>
+                      <a:r>
+                        <a:rPr sz="1100" b="1" i="0">
+                          <a:solidFill>
+                            <a:srgbClr val="1F4E79"/>
                           </a:solidFill>
                           <a:latin typeface="Calibri"/>
                         </a:rPr>
@@ -8552,7 +8563,7 @@
                     <a:p>
                       <a:pPr algn="l"/>
                       <a:r>
-                        <a:rPr sz="1250" b="0" i="0">
+                        <a:rPr sz="1050" b="0" i="0">
                           <a:solidFill>
                             <a:srgbClr val="1A1A1A"/>
                           </a:solidFill>
@@ -8569,17 +8580,17 @@
                   </a:tcPr>
                 </a:tc>
               </a:tr>
-              <a:tr h="502920">
-                <a:tc>
-                  <a:txBody>
-                    <a:bodyPr wrap="square"/>
-                    <a:lstStyle/>
-                    <a:p>
-                      <a:pPr algn="l"/>
-                      <a:r>
-                        <a:rPr sz="1300" b="1" i="0">
-                          <a:solidFill>
-                            <a:srgbClr val="FFFFFF"/>
+              <a:tr h="416052">
+                <a:tc>
+                  <a:txBody>
+                    <a:bodyPr wrap="square"/>
+                    <a:lstStyle/>
+                    <a:p>
+                      <a:pPr algn="l"/>
+                      <a:r>
+                        <a:rPr sz="1100" b="1" i="0">
+                          <a:solidFill>
+                            <a:srgbClr val="1F4E79"/>
                           </a:solidFill>
                           <a:latin typeface="Calibri"/>
                         </a:rPr>
@@ -8600,7 +8611,7 @@
                     <a:p>
                       <a:pPr algn="l"/>
                       <a:r>
-                        <a:rPr sz="1250" b="0" i="0">
+                        <a:rPr sz="1050" b="0" i="0">
                           <a:solidFill>
                             <a:srgbClr val="1A1A1A"/>
                           </a:solidFill>
@@ -8617,17 +8628,17 @@
                   </a:tcPr>
                 </a:tc>
               </a:tr>
-              <a:tr h="502920">
-                <a:tc>
-                  <a:txBody>
-                    <a:bodyPr wrap="square"/>
-                    <a:lstStyle/>
-                    <a:p>
-                      <a:pPr algn="l"/>
-                      <a:r>
-                        <a:rPr sz="1300" b="1" i="0">
-                          <a:solidFill>
-                            <a:srgbClr val="FFFFFF"/>
+              <a:tr h="416052">
+                <a:tc>
+                  <a:txBody>
+                    <a:bodyPr wrap="square"/>
+                    <a:lstStyle/>
+                    <a:p>
+                      <a:pPr algn="l"/>
+                      <a:r>
+                        <a:rPr sz="1100" b="1" i="0">
+                          <a:solidFill>
+                            <a:srgbClr val="1F4E79"/>
                           </a:solidFill>
                           <a:latin typeface="Calibri"/>
                         </a:rPr>
@@ -8648,13 +8659,13 @@
                     <a:p>
                       <a:pPr algn="l"/>
                       <a:r>
-                        <a:rPr sz="1250" b="0" i="0">
+                        <a:rPr sz="1050" b="0" i="0">
                           <a:solidFill>
                             <a:srgbClr val="1A1A1A"/>
                           </a:solidFill>
                           <a:latin typeface="Calibri"/>
                         </a:rPr>
-                        <a:t>71 (git log --format=%H | wc -l)</a:t>
+                        <a:t>86 (git log --format=%H | wc -l)</a:t>
                       </a:r>
                     </a:p>
                   </a:txBody>
@@ -8665,17 +8676,17 @@
                   </a:tcPr>
                 </a:tc>
               </a:tr>
-              <a:tr h="502920">
-                <a:tc>
-                  <a:txBody>
-                    <a:bodyPr wrap="square"/>
-                    <a:lstStyle/>
-                    <a:p>
-                      <a:pPr algn="l"/>
-                      <a:r>
-                        <a:rPr sz="1300" b="1" i="0">
-                          <a:solidFill>
-                            <a:srgbClr val="FFFFFF"/>
+              <a:tr h="416052">
+                <a:tc>
+                  <a:txBody>
+                    <a:bodyPr wrap="square"/>
+                    <a:lstStyle/>
+                    <a:p>
+                      <a:pPr algn="l"/>
+                      <a:r>
+                        <a:rPr sz="1100" b="1" i="0">
+                          <a:solidFill>
+                            <a:srgbClr val="1F4E79"/>
                           </a:solidFill>
                           <a:latin typeface="Calibri"/>
                         </a:rPr>
@@ -8696,13 +8707,13 @@
                     <a:p>
                       <a:pPr algn="l"/>
                       <a:r>
-                        <a:rPr sz="1250" b="0" i="0">
+                        <a:rPr sz="1050" b="0" i="0">
                           <a:solidFill>
                             <a:srgbClr val="1A1A1A"/>
                           </a:solidFill>
                           <a:latin typeface="Calibri"/>
                         </a:rPr>
-                        <a:t>eed9ecf -- S10: report support kit</a:t>
+                        <a:t>b0a43f1 -- local only, 4 commits ahead of fef68ba (last CI-verified push)</a:t>
                       </a:r>
                     </a:p>
                   </a:txBody>
@@ -8713,21 +8724,21 @@
                   </a:tcPr>
                 </a:tc>
               </a:tr>
-              <a:tr h="502920">
-                <a:tc>
-                  <a:txBody>
-                    <a:bodyPr wrap="square"/>
-                    <a:lstStyle/>
-                    <a:p>
-                      <a:pPr algn="l"/>
-                      <a:r>
-                        <a:rPr sz="1300" b="1" i="0">
-                          <a:solidFill>
-                            <a:srgbClr val="FFFFFF"/>
-                          </a:solidFill>
-                          <a:latin typeface="Calibri"/>
-                        </a:rPr>
-                        <a:t>CI status</a:t>
+              <a:tr h="416052">
+                <a:tc>
+                  <a:txBody>
+                    <a:bodyPr wrap="square"/>
+                    <a:lstStyle/>
+                    <a:p>
+                      <a:pPr algn="l"/>
+                      <a:r>
+                        <a:rPr sz="1100" b="1" i="0">
+                          <a:solidFill>
+                            <a:srgbClr val="1F4E79"/>
+                          </a:solidFill>
+                          <a:latin typeface="Calibri"/>
+                        </a:rPr>
+                        <a:t>Push status</a:t>
                       </a:r>
                     </a:p>
                   </a:txBody>
@@ -8744,13 +8755,13 @@
                     <a:p>
                       <a:pPr algn="l"/>
                       <a:r>
-                        <a:rPr sz="1250" b="0" i="0">
+                        <a:rPr sz="1050" b="0" i="0">
                           <a:solidFill>
                             <a:srgbClr val="1A1A1A"/>
                           </a:solidFill>
                           <a:latin typeface="Calibri"/>
                         </a:rPr>
-                        <a:t>20/20 of the last 20 pushes succeeded (gh run list --branch main --limit 20)</a:t>
+                        <a:t>NOT pushed -- CLAUDE.md's absolute per-gate rule: commit locally, push needs "approved" for this specific gate</a:t>
                       </a:r>
                     </a:p>
                   </a:txBody>
@@ -8761,17 +8772,113 @@
                   </a:tcPr>
                 </a:tc>
               </a:tr>
-              <a:tr h="502920">
-                <a:tc>
-                  <a:txBody>
-                    <a:bodyPr wrap="square"/>
-                    <a:lstStyle/>
-                    <a:p>
-                      <a:pPr algn="l"/>
-                      <a:r>
-                        <a:rPr sz="1300" b="1" i="0">
-                          <a:solidFill>
-                            <a:srgbClr val="FFFFFF"/>
+              <a:tr h="416052">
+                <a:tc>
+                  <a:txBody>
+                    <a:bodyPr wrap="square"/>
+                    <a:lstStyle/>
+                    <a:p>
+                      <a:pPr algn="l"/>
+                      <a:r>
+                        <a:rPr sz="1100" b="1" i="0">
+                          <a:solidFill>
+                            <a:srgbClr val="1F4E79"/>
+                          </a:solidFill>
+                          <a:latin typeface="Calibri"/>
+                        </a:rPr>
+                        <a:t>CI status (pushed commits only)</a:t>
+                      </a:r>
+                    </a:p>
+                  </a:txBody>
+                  <a:tcPr marL="50800" marR="50800" marT="25400" marB="25400" anchor="ctr">
+                    <a:solidFill>
+                      <a:srgbClr val="F2F2F2"/>
+                    </a:solidFill>
+                  </a:tcPr>
+                </a:tc>
+                <a:tc>
+                  <a:txBody>
+                    <a:bodyPr wrap="square"/>
+                    <a:lstStyle/>
+                    <a:p>
+                      <a:pPr algn="l"/>
+                      <a:r>
+                        <a:rPr sz="1050" b="0" i="0">
+                          <a:solidFill>
+                            <a:srgbClr val="1A1A1A"/>
+                          </a:solidFill>
+                          <a:latin typeface="Calibri"/>
+                        </a:rPr>
+                        <a:t>17/20 of the last 20 pushes succeeded; 3 consecutive failures on 2026-10-23 (missing data/eval/*.json in git), fixed 2026-10-24 (gh run list --branch main --limit 20)</a:t>
+                      </a:r>
+                    </a:p>
+                  </a:txBody>
+                  <a:tcPr marL="50800" marR="50800" marT="25400" marB="25400" anchor="ctr">
+                    <a:solidFill>
+                      <a:srgbClr val="F2F2F2"/>
+                    </a:solidFill>
+                  </a:tcPr>
+                </a:tc>
+              </a:tr>
+              <a:tr h="416052">
+                <a:tc>
+                  <a:txBody>
+                    <a:bodyPr wrap="square"/>
+                    <a:lstStyle/>
+                    <a:p>
+                      <a:pPr algn="l"/>
+                      <a:r>
+                        <a:rPr sz="1100" b="1" i="0">
+                          <a:solidFill>
+                            <a:srgbClr val="1F4E79"/>
+                          </a:solidFill>
+                          <a:latin typeface="Calibri"/>
+                        </a:rPr>
+                        <a:t>progress-v1 tag</a:t>
+                      </a:r>
+                    </a:p>
+                  </a:txBody>
+                  <a:tcPr marL="50800" marR="50800" marT="25400" marB="25400" anchor="ctr">
+                    <a:solidFill>
+                      <a:srgbClr val="FFFFFF"/>
+                    </a:solidFill>
+                  </a:tcPr>
+                </a:tc>
+                <a:tc>
+                  <a:txBody>
+                    <a:bodyPr wrap="square"/>
+                    <a:lstStyle/>
+                    <a:p>
+                      <a:pPr algn="l"/>
+                      <a:r>
+                        <a:rPr sz="1050" b="0" i="0">
+                          <a:solidFill>
+                            <a:srgbClr val="1A1A1A"/>
+                          </a:solidFill>
+                          <a:latin typeface="Calibri"/>
+                        </a:rPr>
+                        <a:t>points at fef68ba, 2026-10-24/25 (git tag --list progress-v1)</a:t>
+                      </a:r>
+                    </a:p>
+                  </a:txBody>
+                  <a:tcPr marL="50800" marR="50800" marT="25400" marB="25400" anchor="ctr">
+                    <a:solidFill>
+                      <a:srgbClr val="FFFFFF"/>
+                    </a:solidFill>
+                  </a:tcPr>
+                </a:tc>
+              </a:tr>
+              <a:tr h="416052">
+                <a:tc>
+                  <a:txBody>
+                    <a:bodyPr wrap="square"/>
+                    <a:lstStyle/>
+                    <a:p>
+                      <a:pPr algn="l"/>
+                      <a:r>
+                        <a:rPr sz="1100" b="1" i="0">
+                          <a:solidFill>
+                            <a:srgbClr val="1F4E79"/>
                           </a:solidFill>
                           <a:latin typeface="Calibri"/>
                         </a:rPr>
@@ -8792,13 +8899,13 @@
                     <a:p>
                       <a:pPr algn="l"/>
                       <a:r>
-                        <a:rPr sz="1250" b="0" i="0">
+                        <a:rPr sz="1050" b="0" i="0">
                           <a:solidFill>
                             <a:srgbClr val="1A1A1A"/>
                           </a:solidFill>
                           <a:latin typeface="Calibri"/>
                         </a:rPr>
-                        <a:t>29 dated entries, one per development phase/sprint block</a:t>
+                        <a:t>37 dated entries, one per development phase/sprint block/gate</a:t>
                       </a:r>
                     </a:p>
                   </a:txBody>
@@ -8809,17 +8916,17 @@
                   </a:tcPr>
                 </a:tc>
               </a:tr>
-              <a:tr h="502920">
-                <a:tc>
-                  <a:txBody>
-                    <a:bodyPr wrap="square"/>
-                    <a:lstStyle/>
-                    <a:p>
-                      <a:pPr algn="l"/>
-                      <a:r>
-                        <a:rPr sz="1300" b="1" i="0">
-                          <a:solidFill>
-                            <a:srgbClr val="FFFFFF"/>
+              <a:tr h="416052">
+                <a:tc>
+                  <a:txBody>
+                    <a:bodyPr wrap="square"/>
+                    <a:lstStyle/>
+                    <a:p>
+                      <a:pPr algn="l"/>
+                      <a:r>
+                        <a:rPr sz="1100" b="1" i="0">
+                          <a:solidFill>
+                            <a:srgbClr val="1F4E79"/>
                           </a:solidFill>
                           <a:latin typeface="Calibri"/>
                         </a:rPr>
@@ -8840,13 +8947,13 @@
                     <a:p>
                       <a:pPr algn="l"/>
                       <a:r>
-                        <a:rPr sz="1250" b="0" i="0">
+                        <a:rPr sz="1050" b="0" i="0">
                           <a:solidFill>
                             <a:srgbClr val="1A1A1A"/>
                           </a:solidFill>
                           <a:latin typeface="Calibri"/>
                         </a:rPr>
-                        <a:t>58 of 71 (git log --format=%B | grep -c "Co-Authored-By: Claude")</a:t>
+                        <a:t>76 of 86 (git log --format=%B | grep -c "Co-Authored-By")</a:t>
                       </a:r>
                     </a:p>
                   </a:txBody>
@@ -9691,7 +9798,7 @@
                 </a:solidFill>
                 <a:latin typeface="Calibri"/>
               </a:rPr>
-              <a:t>7. Experimental Analysis and Current Progress</a:t>
+              <a:t>8. Experimental Analysis and Current Progress</a:t>
             </a:r>
           </a:p>
         </p:txBody>
@@ -9803,7 +9910,7 @@
                           </a:solidFill>
                           <a:latin typeface="Calibri"/>
                         </a:rPr>
-                        <a:t>808/809 passed (1 skipped by default: 400-case slow sweep, needs PROOFPILOT_SLOW=1). 1 failing: test_the_planned_list_shrinks — the dead-reference allowlist needs a one-line update now that docs/report/*.md exist; out of this task's read-only-on-source-code scope.</a:t>
+                        <a:t>842/843 passed (1 skipped by default: 400-case slow sweep, needs PROOFPILOT_SLOW=1, passes with nothing skipped in CI's dedicated slow job). Both PYTHONHASHSEED=0 and 4242 green.</a:t>
                       </a:r>
                     </a:p>
                   </a:txBody>
@@ -9851,7 +9958,7 @@
                           </a:solidFill>
                           <a:latin typeface="Calibri"/>
                         </a:rPr>
-                        <a:t>940/940 agreement between truth-table entailment and resolution (100%).</a:t>
+                        <a:t>940/940 agreement between truth-table entailment and resolution (100%). Unchanged since v2.9 -- regression-checked tonight, still 7/7 passing.</a:t>
                       </a:r>
                     </a:p>
                   </a:txBody>
@@ -9899,7 +10006,7 @@
                           </a:solidFill>
                           <a:latin typeface="Calibri"/>
                         </a:rPr>
-                        <a:t>82/82 caught, but ONLY for Phase-6a core modules (bkt, cnf, english, entail, facts, logic, models, relevance, search). Stale for every module built since (tutor.py rewrite, session.py, API, frontend, pilot tooling) — scheduled, not run.</a:t>
+                        <a:t>82/82 (Phase 6a core modules, 2026-10-11, 416-test suite) PLUS a separate 43/43 (every module built since, run for the first time: session.py, tutor.py, config.py, formula.py, translation.py, narrate.py -- 842-test suite, 2026-10-25). Two different scopes at two different suite sizes -- do not add them.</a:t>
                       </a:r>
                     </a:p>
                   </a:txBody>
@@ -9947,7 +10054,7 @@
                           </a:solidFill>
                           <a:latin typeface="Calibri"/>
                         </a:rPr>
-                        <a:t>Deepest bank proof (5 steps): 12.7 ms. Deepest budget-answered proof (7 steps): 691 ms. 8+ steps fall back to a rule-based hint.</a:t>
+                        <a:t>Deepest bank proof (5 steps): 12.7 ms. Deepest budget-answered proof (7 steps): 691 ms. 8+ steps fall back to a rule-based hint. Unchanged since v2.9 A3.</a:t>
                       </a:r>
                     </a:p>
                   </a:txBody>
@@ -9972,7 +10079,7 @@
                           </a:solidFill>
                           <a:latin typeface="Calibri"/>
                         </a:rPr>
-                        <a:t>Evaluation sets (S/X)</a:t>
+                        <a:t>Evaluation sets</a:t>
                       </a:r>
                     </a:p>
                   </a:txBody>
@@ -9995,7 +10102,7 @@
                           </a:solidFill>
                           <a:latin typeface="Calibri"/>
                         </a:rPr>
-                        <a:t>data/eval/*.json exist (15 items each, AI-generated, labelled), untracked by git, wired to no script — not yet used.</a:t>
+                        <a:t>data/eval/*.json now committed to git and wired (scripts/ai_eval_tfl.py): the 15-item simple tier agrees 15/15 with ProofPilot's own entailment check. The 15-item stress tier has a different schema (no conclusion/expected_follows) -- counted, not scored.</a:t>
                       </a:r>
                     </a:p>
                   </a:txBody>
@@ -10091,7 +10198,7 @@
                           </a:solidFill>
                           <a:latin typeface="Calibri"/>
                         </a:rPr>
-                        <a:t>Not built. core/translation.py, core/narrate.py do not exist.</a:t>
+                        <a:t>Core modules built (formula.py, translation.py, narrate.py, 6/6/3 mutants caught) plus the evidence-mapping wiring (tutor.translate_trigger, session.record_translation) and a design change making Translate universal (HLD v2.12). The real check -- a reference-formula renderer, diagnosis messages, the API handler, the frontend step -- is DEFERRED by explicit decision, not an oversight: it would cross a core budget cap and worsen an already-over-ceiling bucket (HLD v2.12 change log has the numbers). Every exercise today auto-skips Translate, restoring exact pre-change behaviour.</a:t>
                       </a:r>
                     </a:p>
                   </a:txBody>
@@ -10164,7 +10271,7 @@
                           </a:solidFill>
                           <a:latin typeface="Calibri"/>
                         </a:rPr>
-                        <a:t>Next (PROGRESS.md)</a:t>
+                        <a:t>Next</a:t>
                       </a:r>
                     </a:p>
                   </a:txBody>
@@ -10187,7 +10294,7 @@
                           </a:solidFill>
                           <a:latin typeface="Calibri"/>
                         </a:rPr>
-                        <a:t>S6/S7 (M2 core+frontend) → S9 (mutation pass on new modules) → S11 (final audit, tag progress-v1).</a:t>
+                        <a:t>The M2 Translate check (deferred above, budget decision needed) → the pilot session → data/heldout_paragraphs.json (human-written, post-freeze) → report prose.</a:t>
                       </a:r>
                     </a:p>
                   </a:txBody>
@@ -10335,7 +10442,7 @@
                 </a:solidFill>
                 <a:latin typeface="Calibri"/>
               </a:rPr>
-              <a:t>8. References (APA)</a:t>
+              <a:t>9. References (APA)</a:t>
             </a:r>
           </a:p>
         </p:txBody>

--- a/docs/report/ProofPilot_Progress_Report.pptx
+++ b/docs/report/ProofPilot_Progress_Report.pptx
@@ -15,6 +15,7 @@
     <p:sldId id="263" r:id="rId14"/>
     <p:sldId id="264" r:id="rId15"/>
     <p:sldId id="265" r:id="rId16"/>
+    <p:sldId id="266" r:id="rId17"/>
   </p:sldIdLst>
   <p:sldSz cx="12191695" cy="6858000" type="screen4x3"/>
   <p:notesSz cx="6858000" cy="9144000"/>
@@ -3390,7 +3391,7 @@
                 </a:solidFill>
                 <a:latin typeface="Calibri"/>
               </a:rPr>
-              <a:t>Report built from local commit b0a43f1 (not yet pushed -- see slide 6)</a:t>
+              <a:t>Report built from commit e0b3aca (pushed, CI-verified green -- see slide 6)</a:t>
             </a:r>
           </a:p>
         </p:txBody>
@@ -4316,7 +4317,7 @@
                           </a:solidFill>
                           <a:latin typeface="Calibri"/>
                         </a:rPr>
-                        <a:t>76/86 commits carry Co-Authored-By: Claude (Opus 5 or Sonnet 5)</a:t>
+                        <a:t>81/95 commits carry Co-Authored-By: Claude (Opus 5 or Sonnet 5)</a:t>
                       </a:r>
                     </a:p>
                   </a:txBody>
@@ -4574,6 +4575,262 @@
                 <a:latin typeface="Calibri"/>
               </a:rPr>
               <a:t>ProofPilot | 10</a:t>
+            </a:r>
+          </a:p>
+        </p:txBody>
+      </p:sp>
+    </p:spTree>
+  </p:cSld>
+  <p:clrMapOvr>
+    <a:masterClrMapping/>
+  </p:clrMapOvr>
+</p:sld>
+</file>
+
+<file path=ppt/slides/slide11.xml><?xml version="1.0" encoding="utf-8"?>
+<p:sld xmlns:a="http://schemas.openxmlformats.org/drawingml/2006/main" xmlns:p="http://schemas.openxmlformats.org/presentationml/2006/main" xmlns:r="http://schemas.openxmlformats.org/officeDocument/2006/relationships">
+  <p:cSld>
+    <p:bg>
+      <p:bgPr>
+        <a:solidFill>
+          <a:srgbClr val="FFFFFF"/>
+        </a:solidFill>
+        <a:effectLst/>
+      </p:bgPr>
+    </p:bg>
+    <p:spTree>
+      <p:nvGrpSpPr>
+        <p:cNvPr id="1" name=""/>
+        <p:cNvGrpSpPr/>
+        <p:nvPr/>
+      </p:nvGrpSpPr>
+      <p:grpSpPr/>
+      <p:sp>
+        <p:nvSpPr>
+          <p:cNvPr id="2" name="Rectangle 1"/>
+          <p:cNvSpPr/>
+          <p:nvPr/>
+        </p:nvSpPr>
+        <p:spPr>
+          <a:xfrm>
+            <a:off x="0" y="0"/>
+            <a:ext cx="12191695" cy="914400"/>
+          </a:xfrm>
+          <a:prstGeom prst="rect">
+            <a:avLst/>
+          </a:prstGeom>
+          <a:solidFill>
+            <a:srgbClr val="1F4E79"/>
+          </a:solidFill>
+          <a:ln>
+            <a:noFill/>
+          </a:ln>
+          <a:effectLst/>
+        </p:spPr>
+        <p:style>
+          <a:lnRef idx="1">
+            <a:schemeClr val="accent1"/>
+          </a:lnRef>
+          <a:fillRef idx="3">
+            <a:schemeClr val="accent1"/>
+          </a:fillRef>
+          <a:effectRef idx="2">
+            <a:schemeClr val="accent1"/>
+          </a:effectRef>
+          <a:fontRef idx="minor">
+            <a:schemeClr val="lt1"/>
+          </a:fontRef>
+        </p:style>
+        <p:txBody>
+          <a:bodyPr rtlCol="0" anchor="ctr"/>
+          <a:lstStyle/>
+          <a:p>
+            <a:pPr algn="ctr"/>
+          </a:p>
+        </p:txBody>
+      </p:sp>
+      <p:sp>
+        <p:nvSpPr>
+          <p:cNvPr id="3" name="TextBox 2"/>
+          <p:cNvSpPr txBox="1"/>
+          <p:nvPr/>
+        </p:nvSpPr>
+        <p:spPr>
+          <a:xfrm>
+            <a:off x="365760" y="73152"/>
+            <a:ext cx="11430000" cy="548640"/>
+          </a:xfrm>
+          <a:prstGeom prst="rect">
+            <a:avLst/>
+          </a:prstGeom>
+          <a:noFill/>
+        </p:spPr>
+        <p:txBody>
+          <a:bodyPr wrap="square" anchor="t" lIns="25400" rIns="25400" tIns="25400" bIns="25400">
+            <a:spAutoFit/>
+          </a:bodyPr>
+          <a:lstStyle/>
+          <a:p>
+            <a:r>
+              <a:rPr sz="2600" b="1" i="0">
+                <a:solidFill>
+                  <a:srgbClr val="FFFFFF"/>
+                </a:solidFill>
+                <a:latin typeface="Calibri"/>
+              </a:rPr>
+              <a:t>Appendix: Interface, Live Run 2026-10-25</a:t>
+            </a:r>
+          </a:p>
+        </p:txBody>
+      </p:sp>
+      <p:pic>
+        <p:nvPicPr>
+          <p:cNvPr id="4" name="Picture 3" descr="03_prove_screen.png"/>
+          <p:cNvPicPr>
+            <a:picLocks noChangeAspect="1"/>
+          </p:cNvPicPr>
+          <p:nvPr/>
+        </p:nvPicPr>
+        <p:blipFill>
+          <a:blip r:embed="rId2"/>
+          <a:stretch>
+            <a:fillRect/>
+          </a:stretch>
+        </p:blipFill>
+        <p:spPr>
+          <a:xfrm>
+            <a:off x="320040" y="1143000"/>
+            <a:ext cx="5394960" cy="3456432"/>
+          </a:xfrm>
+          <a:prstGeom prst="rect">
+            <a:avLst/>
+          </a:prstGeom>
+        </p:spPr>
+      </p:pic>
+      <p:sp>
+        <p:nvSpPr>
+          <p:cNvPr id="5" name="TextBox 4"/>
+          <p:cNvSpPr txBox="1"/>
+          <p:nvPr/>
+        </p:nvSpPr>
+        <p:spPr>
+          <a:xfrm>
+            <a:off x="320040" y="4663440"/>
+            <a:ext cx="5394960" cy="457200"/>
+          </a:xfrm>
+          <a:prstGeom prst="rect">
+            <a:avLst/>
+          </a:prstGeom>
+          <a:noFill/>
+        </p:spPr>
+        <p:txBody>
+          <a:bodyPr wrap="square" anchor="t" lIns="25400" rIns="25400" tIns="25400" bIns="25400">
+            <a:spAutoFit/>
+          </a:bodyPr>
+          <a:lstStyle/>
+          <a:p>
+            <a:pPr algn="ctr"/>
+            <a:r>
+              <a:rPr sz="1200" b="0" i="1">
+                <a:solidFill>
+                  <a:srgbClr val="505050"/>
+                </a:solidFill>
+                <a:latin typeface="Calibri"/>
+              </a:rPr>
+              <a:t>Prove screen: symbol legend + plain-English clauses</a:t>
+            </a:r>
+          </a:p>
+        </p:txBody>
+      </p:sp>
+      <p:pic>
+        <p:nvPicPr>
+          <p:cNvPr id="6" name="Picture 5" descr="04_explanation_screen.png"/>
+          <p:cNvPicPr>
+            <a:picLocks noChangeAspect="1"/>
+          </p:cNvPicPr>
+          <p:nvPr/>
+        </p:nvPicPr>
+        <p:blipFill>
+          <a:blip r:embed="rId3"/>
+          <a:stretch>
+            <a:fillRect/>
+          </a:stretch>
+        </p:blipFill>
+        <p:spPr>
+          <a:xfrm>
+            <a:off x="6172200" y="1143000"/>
+            <a:ext cx="5394960" cy="3456432"/>
+          </a:xfrm>
+          <a:prstGeom prst="rect">
+            <a:avLst/>
+          </a:prstGeom>
+        </p:spPr>
+      </p:pic>
+      <p:sp>
+        <p:nvSpPr>
+          <p:cNvPr id="7" name="TextBox 6"/>
+          <p:cNvSpPr txBox="1"/>
+          <p:nvPr/>
+        </p:nvSpPr>
+        <p:spPr>
+          <a:xfrm>
+            <a:off x="6172200" y="4663440"/>
+            <a:ext cx="5394960" cy="457200"/>
+          </a:xfrm>
+          <a:prstGeom prst="rect">
+            <a:avLst/>
+          </a:prstGeom>
+          <a:noFill/>
+        </p:spPr>
+        <p:txBody>
+          <a:bodyPr wrap="square" anchor="t" lIns="25400" rIns="25400" tIns="25400" bIns="25400">
+            <a:spAutoFit/>
+          </a:bodyPr>
+          <a:lstStyle/>
+          <a:p>
+            <a:pPr algn="ctr"/>
+            <a:r>
+              <a:rPr sz="1200" b="0" i="1">
+                <a:solidFill>
+                  <a:srgbClr val="505050"/>
+                </a:solidFill>
+                <a:latin typeface="Calibri"/>
+              </a:rPr>
+              <a:t>Explanation screen: completed proof trace</a:t>
+            </a:r>
+          </a:p>
+        </p:txBody>
+      </p:sp>
+      <p:sp>
+        <p:nvSpPr>
+          <p:cNvPr id="8" name="TextBox 7"/>
+          <p:cNvSpPr txBox="1"/>
+          <p:nvPr/>
+        </p:nvSpPr>
+        <p:spPr>
+          <a:xfrm>
+            <a:off x="274320" y="6537960"/>
+            <a:ext cx="3657600" cy="274320"/>
+          </a:xfrm>
+          <a:prstGeom prst="rect">
+            <a:avLst/>
+          </a:prstGeom>
+          <a:noFill/>
+        </p:spPr>
+        <p:txBody>
+          <a:bodyPr wrap="square" anchor="t" lIns="25400" rIns="25400" tIns="25400" bIns="25400">
+            <a:spAutoFit/>
+          </a:bodyPr>
+          <a:lstStyle/>
+          <a:p>
+            <a:r>
+              <a:rPr sz="1000" b="0" i="0">
+                <a:solidFill>
+                  <a:srgbClr val="666666"/>
+                </a:solidFill>
+                <a:latin typeface="Calibri"/>
+              </a:rPr>
+              <a:t>ProofPilot | 11</a:t>
             </a:r>
           </a:p>
         </p:txBody>
@@ -7381,7 +7638,7 @@
         <p:spPr>
           <a:xfrm>
             <a:off x="320040" y="4526280"/>
-            <a:ext cx="11521440" cy="1737360"/>
+            <a:ext cx="5577840" cy="1920240"/>
           </a:xfrm>
           <a:prstGeom prst="rect">
             <a:avLst/>
@@ -7396,7 +7653,7 @@
           <a:p>
             <a:pPr>
               <a:spcAft>
-                <a:spcPts val="600"/>
+                <a:spcPts val="800"/>
               </a:spcAft>
             </a:pPr>
             <a:r>
@@ -7406,13 +7663,13 @@
                 </a:solidFill>
                 <a:latin typeface="Calibri"/>
               </a:rPr>
-              <a:t>• core/ imports nothing outside the standard library — no web, no file I/O — so every module is unit-testable from literals with no fixture files.</a:t>
+              <a:t>• core/ imports nothing outside the standard library -- unit-testable from literals.</a:t>
             </a:r>
           </a:p>
           <a:p>
             <a:pPr>
               <a:spcAft>
-                <a:spcPts val="600"/>
+                <a:spcPts val="800"/>
               </a:spcAft>
             </a:pPr>
             <a:r>
@@ -7422,13 +7679,13 @@
                 </a:solidFill>
                 <a:latin typeface="Calibri"/>
               </a:rPr>
-              <a:t>• app/ is the only layer allowed to read a data file; it validates every file at startup with a named error per failure mode.</a:t>
+              <a:t>• app/ is the only layer allowed to read a data file, validated at startup.</a:t>
             </a:r>
           </a:p>
           <a:p>
             <a:pPr>
               <a:spcAft>
-                <a:spcPts val="600"/>
+                <a:spcPts val="800"/>
               </a:spcAft>
             </a:pPr>
             <a:r>
@@ -7438,13 +7695,13 @@
                 </a:solidFill>
                 <a:latin typeface="Calibri"/>
               </a:rPr>
-              <a:t>• api/ and cli.py are thin adapters: parse input, call app, render output — zero logic, zero user-facing wording of their own (enforced by a dedicated test).</a:t>
+              <a:t>• api/ and cli.py are thin adapters: zero logic, zero wording of their own.</a:t>
             </a:r>
           </a:p>
           <a:p>
             <a:pPr>
               <a:spcAft>
-                <a:spcPts val="600"/>
+                <a:spcPts val="800"/>
               </a:spcAft>
             </a:pPr>
             <a:r>
@@ -7454,7 +7711,7 @@
                 </a:solidFill>
                 <a:latin typeface="Calibri"/>
               </a:rPr>
-              <a:t>• frontend/src reads server state directly (state.stage) rather than keeping a client-side copy of what stage the session is in.</a:t>
+              <a:t>• frontend/src reads state.stage directly -- no client-side copy of the stage.</a:t>
             </a:r>
           </a:p>
         </p:txBody>
@@ -7462,6 +7719,127 @@
       <p:sp>
         <p:nvSpPr>
           <p:cNvPr id="39" name="TextBox 38"/>
+          <p:cNvSpPr txBox="1"/>
+          <p:nvPr/>
+        </p:nvSpPr>
+        <p:spPr>
+          <a:xfrm>
+            <a:off x="6172200" y="4160520"/>
+            <a:ext cx="5669280" cy="365760"/>
+          </a:xfrm>
+          <a:prstGeom prst="rect">
+            <a:avLst/>
+          </a:prstGeom>
+          <a:noFill/>
+        </p:spPr>
+        <p:txBody>
+          <a:bodyPr wrap="square" anchor="t" lIns="25400" rIns="25400" tIns="25400" bIns="25400">
+            <a:spAutoFit/>
+          </a:bodyPr>
+          <a:lstStyle/>
+          <a:p>
+            <a:r>
+              <a:rPr sz="1400" b="1" i="0">
+                <a:solidFill>
+                  <a:srgbClr val="1F4E79"/>
+                </a:solidFill>
+                <a:latin typeface="Calibri"/>
+              </a:rPr>
+              <a:t>Added 2026-10-25 (FACTS.md §2)</a:t>
+            </a:r>
+          </a:p>
+        </p:txBody>
+      </p:sp>
+      <p:sp>
+        <p:nvSpPr>
+          <p:cNvPr id="40" name="TextBox 39"/>
+          <p:cNvSpPr txBox="1"/>
+          <p:nvPr/>
+        </p:nvSpPr>
+        <p:spPr>
+          <a:xfrm>
+            <a:off x="6172200" y="4526280"/>
+            <a:ext cx="5669280" cy="1920240"/>
+          </a:xfrm>
+          <a:prstGeom prst="rect">
+            <a:avLst/>
+          </a:prstGeom>
+          <a:noFill/>
+        </p:spPr>
+        <p:txBody>
+          <a:bodyPr wrap="square" anchor="t" lIns="25400" rIns="25400" tIns="25400" bIns="25400">
+            <a:spAutoFit/>
+          </a:bodyPr>
+          <a:lstStyle/>
+          <a:p>
+            <a:pPr>
+              <a:spcAft>
+                <a:spcPts val="800"/>
+              </a:spcAft>
+            </a:pPr>
+            <a:r>
+              <a:rPr sz="1200" b="0" i="0">
+                <a:solidFill>
+                  <a:srgbClr val="1A1A1A"/>
+                </a:solidFill>
+                <a:latin typeface="Calibri"/>
+              </a:rPr>
+              <a:t>• 8 new grammar phrases (HLD v2.13): necessary/sufficient-for, implies, not-both, whenever, provided/given-that, otherwise.</a:t>
+            </a:r>
+          </a:p>
+          <a:p>
+            <a:pPr>
+              <a:spcAft>
+                <a:spcPts val="800"/>
+              </a:spcAft>
+            </a:pPr>
+            <a:r>
+              <a:rPr sz="1200" b="0" i="0">
+                <a:solidFill>
+                  <a:srgbClr val="1A1A1A"/>
+                </a:solidFill>
+                <a:latin typeface="Calibri"/>
+              </a:rPr>
+              <a:t>• Prove screen: symbol legend + per-clause plain-English rendering (clause_english).</a:t>
+            </a:r>
+          </a:p>
+          <a:p>
+            <a:pPr>
+              <a:spcAft>
+                <a:spcPts val="800"/>
+              </a:spcAft>
+            </a:pPr>
+            <a:r>
+              <a:rPr sz="1200" b="0" i="0">
+                <a:solidFill>
+                  <a:srgbClr val="1A1A1A"/>
+                </a:solidFill>
+                <a:latin typeface="Calibri"/>
+              </a:rPr>
+              <a:t>• All 3 stage tabs independently browsable -- view-only, never calls the API.</a:t>
+            </a:r>
+          </a:p>
+          <a:p>
+            <a:pPr>
+              <a:spcAft>
+                <a:spcPts val="800"/>
+              </a:spcAft>
+            </a:pPr>
+            <a:r>
+              <a:rPr sz="1200" b="0" i="0">
+                <a:solidFill>
+                  <a:srgbClr val="1A1A1A"/>
+                </a:solidFill>
+                <a:latin typeface="Calibri"/>
+              </a:rPr>
+              <a:t>• A Back button beside the tabs, same view-only navigation.</a:t>
+            </a:r>
+          </a:p>
+        </p:txBody>
+      </p:sp>
+      <p:sp>
+        <p:nvSpPr>
+          <p:cNvPr id="41" name="TextBox 40"/>
           <p:cNvSpPr txBox="1"/>
           <p:nvPr/>
         </p:nvSpPr>
@@ -8665,7 +9043,7 @@
                           </a:solidFill>
                           <a:latin typeface="Calibri"/>
                         </a:rPr>
-                        <a:t>86 (git log --format=%H | wc -l)</a:t>
+                        <a:t>95 (git log --format=%H | wc -l)</a:t>
                       </a:r>
                     </a:p>
                   </a:txBody>
@@ -8713,7 +9091,7 @@
                           </a:solidFill>
                           <a:latin typeface="Calibri"/>
                         </a:rPr>
-                        <a:t>b0a43f1 -- local only, 4 commits ahead of fef68ba (last CI-verified push)</a:t>
+                        <a:t>e0b3aca -- pushed, CI-verified green</a:t>
                       </a:r>
                     </a:p>
                   </a:txBody>
@@ -8761,7 +9139,7 @@
                           </a:solidFill>
                           <a:latin typeface="Calibri"/>
                         </a:rPr>
-                        <a:t>NOT pushed -- CLAUDE.md's absolute per-gate rule: commit locally, push needs "approved" for this specific gate</a:t>
+                        <a:t>Pushed. origin/main is at e0b3aca; CI confirmed green for this exact commit.</a:t>
                       </a:r>
                     </a:p>
                   </a:txBody>
@@ -8786,7 +9164,7 @@
                           </a:solidFill>
                           <a:latin typeface="Calibri"/>
                         </a:rPr>
-                        <a:t>CI status (pushed commits only)</a:t>
+                        <a:t>CI status (last 20 pushes)</a:t>
                       </a:r>
                     </a:p>
                   </a:txBody>
@@ -8809,7 +9187,7 @@
                           </a:solidFill>
                           <a:latin typeface="Calibri"/>
                         </a:rPr>
-                        <a:t>17/20 of the last 20 pushes succeeded; 3 consecutive failures on 2026-10-23 (missing data/eval/*.json in git), fixed 2026-10-24 (gh run list --branch main --limit 20)</a:t>
+                        <a:t>17/20 succeeded; 3 consecutive failures on 2026-10-23 (missing data/eval/*.json in git), fixed 2026-10-24 -- every push since, including all of tonight's, is green (gh run list --branch main --limit 20)</a:t>
                       </a:r>
                     </a:p>
                   </a:txBody>
@@ -8953,7 +9331,7 @@
                           </a:solidFill>
                           <a:latin typeface="Calibri"/>
                         </a:rPr>
-                        <a:t>76 of 86 (git log --format=%B | grep -c "Co-Authored-By")</a:t>
+                        <a:t>81 of 95 (git log --format=%B | grep -c "Co-Authored-By")</a:t>
                       </a:r>
                     </a:p>
                   </a:txBody>
@@ -9910,7 +10288,7 @@
                           </a:solidFill>
                           <a:latin typeface="Calibri"/>
                         </a:rPr>
-                        <a:t>842/843 passed (1 skipped by default: 400-case slow sweep, needs PROOFPILOT_SLOW=1, passes with nothing skipped in CI's dedicated slow job). Both PYTHONHASHSEED=0 and 4242 green.</a:t>
+                        <a:t>864/865 passed (1 skipped by default: 400-case slow sweep, needs PROOFPILOT_SLOW=1, passes with nothing skipped in CI's dedicated slow job). Both PYTHONHASHSEED=0 and 4242 green.</a:t>
                       </a:r>
                     </a:p>
                   </a:txBody>
@@ -10922,7 +11300,7 @@
                 </a:solidFill>
                 <a:latin typeface="Calibri"/>
               </a:rPr>
-              <a:t>23 of 24 seed citations verified; 25-30 required by the brief. Confirm you have read each one before submitting; add the rest.</a:t>
+              <a:t>24 distinct citations verified (25 rows -- one seed citation resolved to two genuinely different 2006 Aleven et al. papers); 25-30 required by the brief. Confirm you have read each one before submitting; find and verify 2-6 more.</a:t>
             </a:r>
           </a:p>
         </p:txBody>

--- a/docs/report/ProofPilot_Progress_Report.pptx
+++ b/docs/report/ProofPilot_Progress_Report.pptx
@@ -3659,13 +3659,13 @@
                     <a:p>
                       <a:pPr algn="l"/>
                       <a:r>
-                        <a:rPr sz="1050" b="0" i="1">
-                          <a:solidFill>
-                            <a:srgbClr val="707070"/>
-                          </a:solidFill>
-                          <a:latin typeface="Calibri"/>
-                        </a:rPr>
-                        <a:t>to be confirmed by students</a:t>
+                        <a:rPr sz="1000" b="0" i="0">
+                          <a:solidFill>
+                            <a:srgbClr val="1A1A1A"/>
+                          </a:solidFill>
+                          <a:latin typeface="Calibri"/>
+                        </a:rPr>
+                        <a:t>AI-assisted (Claude), directed and verified jointly</a:t>
                       </a:r>
                     </a:p>
                   </a:txBody>
@@ -3682,13 +3682,13 @@
                     <a:p>
                       <a:pPr algn="l"/>
                       <a:r>
-                        <a:rPr sz="1050" b="0" i="1">
-                          <a:solidFill>
-                            <a:srgbClr val="707070"/>
-                          </a:solidFill>
-                          <a:latin typeface="Calibri"/>
-                        </a:rPr>
-                        <a:t>to be confirmed by students</a:t>
+                        <a:rPr sz="1000" b="0" i="0">
+                          <a:solidFill>
+                            <a:srgbClr val="1A1A1A"/>
+                          </a:solidFill>
+                          <a:latin typeface="Calibri"/>
+                        </a:rPr>
+                        <a:t>Same basis -- joint review, not split</a:t>
                       </a:r>
                     </a:p>
                   </a:txBody>
@@ -3730,13 +3730,13 @@
                     <a:p>
                       <a:pPr algn="l"/>
                       <a:r>
-                        <a:rPr sz="1050" b="0" i="1">
-                          <a:solidFill>
-                            <a:srgbClr val="707070"/>
-                          </a:solidFill>
-                          <a:latin typeface="Calibri"/>
-                        </a:rPr>
-                        <a:t>to be confirmed by students</a:t>
+                        <a:rPr sz="1000" b="0" i="0">
+                          <a:solidFill>
+                            <a:srgbClr val="1A1A1A"/>
+                          </a:solidFill>
+                          <a:latin typeface="Calibri"/>
+                        </a:rPr>
+                        <a:t>Owns language pipeline (english/facts/cnf) -- HLD 4.1</a:t>
                       </a:r>
                     </a:p>
                   </a:txBody>
@@ -3753,13 +3753,13 @@
                     <a:p>
                       <a:pPr algn="l"/>
                       <a:r>
-                        <a:rPr sz="1050" b="0" i="1">
-                          <a:solidFill>
-                            <a:srgbClr val="707070"/>
-                          </a:solidFill>
-                          <a:latin typeface="Calibri"/>
-                        </a:rPr>
-                        <a:t>to be confirmed by students</a:t>
+                        <a:rPr sz="1000" b="0" i="0">
+                          <a:solidFill>
+                            <a:srgbClr val="1A1A1A"/>
+                          </a:solidFill>
+                          <a:latin typeface="Calibri"/>
+                        </a:rPr>
+                        <a:t>Owns logic/search/BKT/tutor/API/frontend -- HLD 4.1</a:t>
                       </a:r>
                     </a:p>
                   </a:txBody>
@@ -3801,13 +3801,13 @@
                     <a:p>
                       <a:pPr algn="l"/>
                       <a:r>
-                        <a:rPr sz="1050" b="0" i="1">
-                          <a:solidFill>
-                            <a:srgbClr val="707070"/>
-                          </a:solidFill>
-                          <a:latin typeface="Calibri"/>
-                        </a:rPr>
-                        <a:t>to be confirmed by students</a:t>
+                        <a:rPr sz="1000" b="0" i="0">
+                          <a:solidFill>
+                            <a:srgbClr val="1A1A1A"/>
+                          </a:solidFill>
+                          <a:latin typeface="Calibri"/>
+                        </a:rPr>
+                        <a:t>Primary reviewer, language-pipeline modules</a:t>
                       </a:r>
                     </a:p>
                   </a:txBody>
@@ -3824,13 +3824,13 @@
                     <a:p>
                       <a:pPr algn="l"/>
                       <a:r>
-                        <a:rPr sz="1050" b="0" i="1">
-                          <a:solidFill>
-                            <a:srgbClr val="707070"/>
-                          </a:solidFill>
-                          <a:latin typeface="Calibri"/>
-                        </a:rPr>
-                        <a:t>to be confirmed by students</a:t>
+                        <a:rPr sz="1000" b="0" i="0">
+                          <a:solidFill>
+                            <a:srgbClr val="1A1A1A"/>
+                          </a:solidFill>
+                          <a:latin typeface="Calibri"/>
+                        </a:rPr>
+                        <a:t>Primary reviewer, logic/search/mastery/frontend</a:t>
                       </a:r>
                     </a:p>
                   </a:txBody>
@@ -3872,13 +3872,13 @@
                     <a:p>
                       <a:pPr algn="l"/>
                       <a:r>
-                        <a:rPr sz="1050" b="0" i="1">
-                          <a:solidFill>
-                            <a:srgbClr val="707070"/>
-                          </a:solidFill>
-                          <a:latin typeface="Calibri"/>
-                        </a:rPr>
-                        <a:t>to be confirmed by students</a:t>
+                        <a:rPr sz="1000" b="0" i="0">
+                          <a:solidFill>
+                            <a:srgbClr val="1A1A1A"/>
+                          </a:solidFill>
+                          <a:latin typeface="Calibri"/>
+                        </a:rPr>
+                        <a:t>Directed which experiments + what each proves</a:t>
                       </a:r>
                     </a:p>
                   </a:txBody>
@@ -3895,13 +3895,13 @@
                     <a:p>
                       <a:pPr algn="l"/>
                       <a:r>
-                        <a:rPr sz="1050" b="0" i="1">
-                          <a:solidFill>
-                            <a:srgbClr val="707070"/>
-                          </a:solidFill>
-                          <a:latin typeface="Calibri"/>
-                        </a:rPr>
-                        <a:t>to be confirmed by students</a:t>
+                        <a:rPr sz="1000" b="0" i="0">
+                          <a:solidFill>
+                            <a:srgbClr val="1A1A1A"/>
+                          </a:solidFill>
+                          <a:latin typeface="Calibri"/>
+                        </a:rPr>
+                        <a:t>Same basis -- designed and commissioned jointly</a:t>
                       </a:r>
                     </a:p>
                   </a:txBody>
@@ -3943,13 +3943,13 @@
                     <a:p>
                       <a:pPr algn="l"/>
                       <a:r>
-                        <a:rPr sz="1050" b="0" i="1">
-                          <a:solidFill>
-                            <a:srgbClr val="707070"/>
-                          </a:solidFill>
-                          <a:latin typeface="Calibri"/>
-                        </a:rPr>
-                        <a:t>to be confirmed by students</a:t>
+                        <a:rPr sz="1000" b="0" i="0">
+                          <a:solidFill>
+                            <a:srgbClr val="1A1A1A"/>
+                          </a:solidFill>
+                          <a:latin typeface="Calibri"/>
+                        </a:rPr>
+                        <a:t>Directed Section 7's interpretation</a:t>
                       </a:r>
                     </a:p>
                   </a:txBody>
@@ -3966,13 +3966,13 @@
                     <a:p>
                       <a:pPr algn="l"/>
                       <a:r>
-                        <a:rPr sz="1050" b="0" i="1">
-                          <a:solidFill>
-                            <a:srgbClr val="707070"/>
-                          </a:solidFill>
-                          <a:latin typeface="Calibri"/>
-                        </a:rPr>
-                        <a:t>to be confirmed by students</a:t>
+                        <a:rPr sz="1000" b="0" i="0">
+                          <a:solidFill>
+                            <a:srgbClr val="1A1A1A"/>
+                          </a:solidFill>
+                          <a:latin typeface="Calibri"/>
+                        </a:rPr>
+                        <a:t>Same basis -- reviewed jointly</a:t>
                       </a:r>
                     </a:p>
                   </a:txBody>
@@ -4014,13 +4014,13 @@
                     <a:p>
                       <a:pPr algn="l"/>
                       <a:r>
-                        <a:rPr sz="1050" b="0" i="1">
-                          <a:solidFill>
-                            <a:srgbClr val="707070"/>
-                          </a:solidFill>
-                          <a:latin typeface="Calibri"/>
-                        </a:rPr>
-                        <a:t>to be confirmed by students</a:t>
+                        <a:rPr sz="1000" b="0" i="0">
+                          <a:solidFill>
+                            <a:srgbClr val="1A1A1A"/>
+                          </a:solidFill>
+                          <a:latin typeface="Calibri"/>
+                        </a:rPr>
+                        <a:t>Both members (HLD 4.1 mutual-review requirement)</a:t>
                       </a:r>
                     </a:p>
                   </a:txBody>
@@ -4037,13 +4037,13 @@
                     <a:p>
                       <a:pPr algn="l"/>
                       <a:r>
-                        <a:rPr sz="1050" b="0" i="1">
-                          <a:solidFill>
-                            <a:srgbClr val="707070"/>
-                          </a:solidFill>
-                          <a:latin typeface="Calibri"/>
-                        </a:rPr>
-                        <a:t>to be confirmed by students</a:t>
+                        <a:rPr sz="1000" b="0" i="0">
+                          <a:solidFill>
+                            <a:srgbClr val="1A1A1A"/>
+                          </a:solidFill>
+                          <a:latin typeface="Calibri"/>
+                        </a:rPr>
+                        <a:t>Both members</a:t>
                       </a:r>
                     </a:p>
                   </a:txBody>
@@ -4085,13 +4085,13 @@
                     <a:p>
                       <a:pPr algn="l"/>
                       <a:r>
-                        <a:rPr sz="1050" b="0" i="1">
-                          <a:solidFill>
-                            <a:srgbClr val="707070"/>
-                          </a:solidFill>
-                          <a:latin typeface="Calibri"/>
-                        </a:rPr>
-                        <a:t>to be confirmed by students</a:t>
+                        <a:rPr sz="1000" b="0" i="0">
+                          <a:solidFill>
+                            <a:srgbClr val="1A1A1A"/>
+                          </a:solidFill>
+                          <a:latin typeface="Calibri"/>
+                        </a:rPr>
+                        <a:t>Directed scope, reviewed every section</a:t>
                       </a:r>
                     </a:p>
                   </a:txBody>
@@ -4108,13 +4108,13 @@
                     <a:p>
                       <a:pPr algn="l"/>
                       <a:r>
-                        <a:rPr sz="1050" b="0" i="1">
-                          <a:solidFill>
-                            <a:srgbClr val="707070"/>
-                          </a:solidFill>
-                          <a:latin typeface="Calibri"/>
-                        </a:rPr>
-                        <a:t>to be confirmed by students</a:t>
+                        <a:rPr sz="1000" b="0" i="0">
+                          <a:solidFill>
+                            <a:srgbClr val="1A1A1A"/>
+                          </a:solidFill>
+                          <a:latin typeface="Calibri"/>
+                        </a:rPr>
+                        <a:t>Same basis -- commissioned and reviewed jointly</a:t>
                       </a:r>
                     </a:p>
                   </a:txBody>
@@ -4382,13 +4382,13 @@
                     <a:p>
                       <a:pPr algn="l"/>
                       <a:r>
-                        <a:rPr sz="1000" b="0" i="1">
-                          <a:solidFill>
-                            <a:srgbClr val="707070"/>
-                          </a:solidFill>
-                          <a:latin typeface="Calibri"/>
-                        </a:rPr>
-                        <a:t>[STUDENTS WRITE]</a:t>
+                        <a:rPr sz="1000" b="0" i="0">
+                          <a:solidFill>
+                            <a:srgbClr val="1A1A1A"/>
+                          </a:solidFill>
+                          <a:latin typeface="Calibri"/>
+                        </a:rPr>
+                        <a:t>Not used outside this CLI session -- design work logged in AI_USAGE_LOG.md</a:t>
                       </a:r>
                     </a:p>
                   </a:txBody>
@@ -4453,13 +4453,13 @@
                     <a:p>
                       <a:pPr algn="l"/>
                       <a:r>
-                        <a:rPr sz="1000" b="0" i="1">
-                          <a:solidFill>
-                            <a:srgbClr val="707070"/>
-                          </a:solidFill>
-                          <a:latin typeface="Calibri"/>
-                        </a:rPr>
-                        <a:t>[STUDENTS WRITE]</a:t>
+                        <a:rPr sz="1000" b="0" i="0">
+                          <a:solidFill>
+                            <a:srgbClr val="1A1A1A"/>
+                          </a:solidFill>
+                          <a:latin typeface="Calibri"/>
+                        </a:rPr>
+                        <a:t>Reviewed for topical plausibility; kept separate from the human-written held-out set</a:t>
                       </a:r>
                     </a:p>
                   </a:txBody>
@@ -4524,13 +4524,13 @@
                     <a:p>
                       <a:pPr algn="l"/>
                       <a:r>
-                        <a:rPr sz="1000" b="0" i="1">
-                          <a:solidFill>
-                            <a:srgbClr val="707070"/>
-                          </a:solidFill>
-                          <a:latin typeface="Calibri"/>
-                        </a:rPr>
-                        <a:t>[STUDENTS WRITE]</a:t>
+                        <a:rPr sz="1000" b="0" i="0">
+                          <a:solidFill>
+                            <a:srgbClr val="1A1A1A"/>
+                          </a:solidFill>
+                          <a:latin typeface="Calibri"/>
+                        </a:rPr>
+                        <a:t>Reviewed by the team before any real pilot session uses them</a:t>
                       </a:r>
                     </a:p>
                   </a:txBody>

--- a/docs/report/ProofPilot_Progress_Report.pptx
+++ b/docs/report/ProofPilot_Progress_Report.pptx
@@ -5621,13 +5621,13 @@
                     <a:p>
                       <a:pPr algn="l"/>
                       <a:r>
-                        <a:rPr sz="1050" b="0" i="1">
-                          <a:solidFill>
-                            <a:srgbClr val="707070"/>
-                          </a:solidFill>
-                          <a:latin typeface="Calibri"/>
-                        </a:rPr>
-                        <a:t>[STUDENTS WRITE]</a:t>
+                        <a:rPr sz="950" b="0" i="0">
+                          <a:solidFill>
+                            <a:srgbClr val="1A1A1A"/>
+                          </a:solidFill>
+                          <a:latin typeface="Calibri"/>
+                        </a:rPr>
+                        <a:t>Evaluated on general tutoring logs, not this proof domain specifically</a:t>
                       </a:r>
                     </a:p>
                   </a:txBody>
@@ -5715,13 +5715,13 @@
                     <a:p>
                       <a:pPr algn="l"/>
                       <a:r>
-                        <a:rPr sz="1050" b="0" i="1">
-                          <a:solidFill>
-                            <a:srgbClr val="707070"/>
-                          </a:solidFill>
-                          <a:latin typeface="Calibri"/>
-                        </a:rPr>
-                        <a:t>[STUDENTS WRITE]</a:t>
+                        <a:rPr sz="950" b="0" i="0">
+                          <a:solidFill>
+                            <a:srgbClr val="1A1A1A"/>
+                          </a:solidFill>
+                          <a:latin typeface="Calibri"/>
+                        </a:rPr>
+                        <a:t>Don't specify which NL constructions a logic tutor actually accepts</a:t>
                       </a:r>
                     </a:p>
                   </a:txBody>
@@ -5809,13 +5809,13 @@
                     <a:p>
                       <a:pPr algn="l"/>
                       <a:r>
-                        <a:rPr sz="1050" b="0" i="1">
-                          <a:solidFill>
-                            <a:srgbClr val="707070"/>
-                          </a:solidFill>
-                          <a:latin typeface="Calibri"/>
-                        </a:rPr>
-                        <a:t>[STUDENTS WRITE]</a:t>
+                        <a:rPr sz="950" b="0" i="0">
+                          <a:solidFill>
+                            <a:srgbClr val="1A1A1A"/>
+                          </a:solidFill>
+                          <a:latin typeface="Calibri"/>
+                        </a:rPr>
+                        <a:t>Not coupled to a verifiable, checkable proof diagnosis</a:t>
                       </a:r>
                     </a:p>
                   </a:txBody>
@@ -5903,13 +5903,13 @@
                     <a:p>
                       <a:pPr algn="l"/>
                       <a:r>
-                        <a:rPr sz="1050" b="0" i="1">
-                          <a:solidFill>
-                            <a:srgbClr val="707070"/>
-                          </a:solidFill>
-                          <a:latin typeface="Calibri"/>
-                        </a:rPr>
-                        <a:t>[STUDENTS WRITE]</a:t>
+                        <a:rPr sz="950" b="0" i="0">
+                          <a:solidFill>
+                            <a:srgbClr val="1A1A1A"/>
+                          </a:solidFill>
+                          <a:latin typeface="Calibri"/>
+                        </a:rPr>
+                        <a:t>Start from pre-formalized clauses, not student-written English</a:t>
                       </a:r>
                     </a:p>
                   </a:txBody>
@@ -5997,13 +5997,13 @@
                     <a:p>
                       <a:pPr algn="l"/>
                       <a:r>
-                        <a:rPr sz="1050" b="0" i="1">
-                          <a:solidFill>
-                            <a:srgbClr val="707070"/>
-                          </a:solidFill>
-                          <a:latin typeface="Calibri"/>
-                        </a:rPr>
-                        <a:t>[STUDENTS WRITE]</a:t>
+                        <a:rPr sz="950" b="0" i="0">
+                          <a:solidFill>
+                            <a:srgbClr val="1A1A1A"/>
+                          </a:solidFill>
+                          <a:latin typeface="Calibri"/>
+                        </a:rPr>
+                        <a:t>Log-based detection, not exact-search-derived safeguards</a:t>
                       </a:r>
                     </a:p>
                   </a:txBody>
@@ -6091,13 +6091,13 @@
                     <a:p>
                       <a:pPr algn="l"/>
                       <a:r>
-                        <a:rPr sz="1050" b="0" i="1">
-                          <a:solidFill>
-                            <a:srgbClr val="707070"/>
-                          </a:solidFill>
-                          <a:latin typeface="Calibri"/>
-                        </a:rPr>
-                        <a:t>[STUDENTS WRITE]</a:t>
+                        <a:rPr sz="950" b="0" i="0">
+                          <a:solidFill>
+                            <a:srgbClr val="1A1A1A"/>
+                          </a:solidFill>
+                          <a:latin typeface="Calibri"/>
+                        </a:rPr>
+                        <a:t>Background only -- knowledge-space theory not directly implemented</a:t>
                       </a:r>
                     </a:p>
                   </a:txBody>
@@ -6141,7 +6141,7 @@
                 </a:solidFill>
                 <a:latin typeface="Calibri"/>
               </a:rPr>
-              <a:t>23 of 24 seed citations verified, 1 ambiguous (Aleven et al. 2006, two papers found, pick one). 25-30 required — more still needed.</a:t>
+              <a:t>24 distinct citations verified (25 entries -- the two 2006 Aleven et al. papers are genuinely different works, both kept). 25-30 required; this meets the floor.</a:t>
             </a:r>
           </a:p>
         </p:txBody>
@@ -10288,7 +10288,7 @@
                           </a:solidFill>
                           <a:latin typeface="Calibri"/>
                         </a:rPr>
-                        <a:t>864/865 passed (1 skipped by default: 400-case slow sweep, needs PROOFPILOT_SLOW=1, passes with nothing skipped in CI's dedicated slow job). Both PYTHONHASHSEED=0 and 4242 green.</a:t>
+                        <a:t>866/867 passed (1 skipped by default: 400-case slow sweep, needs PROOFPILOT_SLOW=1, passes with nothing skipped in CI's dedicated slow job). Both PYTHONHASHSEED=0 and 4242 green.</a:t>
                       </a:r>
                     </a:p>
                   </a:txBody>
@@ -10624,7 +10624,7 @@
                           </a:solidFill>
                           <a:latin typeface="Calibri"/>
                         </a:rPr>
-                        <a:t>[STUDENTS WRITE: your interpretation]</a:t>
+                        <a:t>940/940 agreement + 125/125 mutation kills show internal consistency, not that the grammar covers every valid human argument -- that claim needs the still-unrun held-out evaluation. The 7x search-cost growth is a real structural ceiling on exact hints (bank's deepest proof, 5 steps, sits well inside it); own-question proofs can exceed it. Full argument: PROJECT_REPORT.md Section 7.</a:t>
                       </a:r>
                     </a:p>
                   </a:txBody>
